--- a/活著為要敬拜你(崇拜版).pptx
+++ b/活著為要敬拜你(崇拜版).pptx
@@ -171,10 +171,9 @@
           <a:lstStyle/>
           <a:p>
             <a:r>
-              <a:rPr lang="zh-TW" altLang="en-US" smtClean="0"/>
+              <a:rPr lang="zh-TW" altLang="en-US"/>
               <a:t>按一下以編輯母片標題樣式</a:t>
             </a:r>
-            <a:endParaRPr lang="zh-TW" altLang="en-US"/>
           </a:p>
         </p:txBody>
       </p:sp>
@@ -290,10 +289,9 @@
           </a:lstStyle>
           <a:p>
             <a:r>
-              <a:rPr lang="zh-TW" altLang="en-US" smtClean="0"/>
+              <a:rPr lang="zh-TW" altLang="en-US"/>
               <a:t>按一下以編輯母片副標題樣式</a:t>
             </a:r>
-            <a:endParaRPr lang="zh-TW" altLang="en-US"/>
           </a:p>
         </p:txBody>
       </p:sp>
@@ -314,7 +312,7 @@
           <a:p>
             <a:fld id="{2739EEB5-7168-4F77-91E9-27903F5B1FCF}" type="datetimeFigureOut">
               <a:rPr lang="zh-TW" altLang="en-US" smtClean="0"/>
-              <a:t>2023/7/29</a:t>
+              <a:t>2025/7/19</a:t>
             </a:fld>
             <a:endParaRPr lang="zh-TW" altLang="en-US"/>
           </a:p>
@@ -403,10 +401,9 @@
           <a:lstStyle/>
           <a:p>
             <a:r>
-              <a:rPr lang="zh-TW" altLang="en-US" smtClean="0"/>
+              <a:rPr lang="zh-TW" altLang="en-US"/>
               <a:t>按一下以編輯母片標題樣式</a:t>
             </a:r>
-            <a:endParaRPr lang="zh-TW" altLang="en-US"/>
           </a:p>
         </p:txBody>
       </p:sp>
@@ -427,38 +424,37 @@
           <a:p>
             <a:pPr lvl="0"/>
             <a:r>
-              <a:rPr lang="zh-TW" altLang="en-US" smtClean="0"/>
+              <a:rPr lang="zh-TW" altLang="en-US"/>
               <a:t>按一下以編輯母片文字樣式</a:t>
             </a:r>
           </a:p>
           <a:p>
             <a:pPr lvl="1"/>
             <a:r>
-              <a:rPr lang="zh-TW" altLang="en-US" smtClean="0"/>
+              <a:rPr lang="zh-TW" altLang="en-US"/>
               <a:t>第二層</a:t>
             </a:r>
           </a:p>
           <a:p>
             <a:pPr lvl="2"/>
             <a:r>
-              <a:rPr lang="zh-TW" altLang="en-US" smtClean="0"/>
+              <a:rPr lang="zh-TW" altLang="en-US"/>
               <a:t>第三層</a:t>
             </a:r>
           </a:p>
           <a:p>
             <a:pPr lvl="3"/>
             <a:r>
-              <a:rPr lang="zh-TW" altLang="en-US" smtClean="0"/>
+              <a:rPr lang="zh-TW" altLang="en-US"/>
               <a:t>第四層</a:t>
             </a:r>
           </a:p>
           <a:p>
             <a:pPr lvl="4"/>
             <a:r>
-              <a:rPr lang="zh-TW" altLang="en-US" smtClean="0"/>
+              <a:rPr lang="zh-TW" altLang="en-US"/>
               <a:t>第五層</a:t>
             </a:r>
-            <a:endParaRPr lang="zh-TW" altLang="en-US"/>
           </a:p>
         </p:txBody>
       </p:sp>
@@ -479,7 +475,7 @@
           <a:p>
             <a:fld id="{2739EEB5-7168-4F77-91E9-27903F5B1FCF}" type="datetimeFigureOut">
               <a:rPr lang="zh-TW" altLang="en-US" smtClean="0"/>
-              <a:t>2023/7/29</a:t>
+              <a:t>2025/7/19</a:t>
             </a:fld>
             <a:endParaRPr lang="zh-TW" altLang="en-US"/>
           </a:p>
@@ -573,10 +569,9 @@
           <a:lstStyle/>
           <a:p>
             <a:r>
-              <a:rPr lang="zh-TW" altLang="en-US" smtClean="0"/>
+              <a:rPr lang="zh-TW" altLang="en-US"/>
               <a:t>按一下以編輯母片標題樣式</a:t>
             </a:r>
-            <a:endParaRPr lang="zh-TW" altLang="en-US"/>
           </a:p>
         </p:txBody>
       </p:sp>
@@ -602,38 +597,37 @@
           <a:p>
             <a:pPr lvl="0"/>
             <a:r>
-              <a:rPr lang="zh-TW" altLang="en-US" smtClean="0"/>
+              <a:rPr lang="zh-TW" altLang="en-US"/>
               <a:t>按一下以編輯母片文字樣式</a:t>
             </a:r>
           </a:p>
           <a:p>
             <a:pPr lvl="1"/>
             <a:r>
-              <a:rPr lang="zh-TW" altLang="en-US" smtClean="0"/>
+              <a:rPr lang="zh-TW" altLang="en-US"/>
               <a:t>第二層</a:t>
             </a:r>
           </a:p>
           <a:p>
             <a:pPr lvl="2"/>
             <a:r>
-              <a:rPr lang="zh-TW" altLang="en-US" smtClean="0"/>
+              <a:rPr lang="zh-TW" altLang="en-US"/>
               <a:t>第三層</a:t>
             </a:r>
           </a:p>
           <a:p>
             <a:pPr lvl="3"/>
             <a:r>
-              <a:rPr lang="zh-TW" altLang="en-US" smtClean="0"/>
+              <a:rPr lang="zh-TW" altLang="en-US"/>
               <a:t>第四層</a:t>
             </a:r>
           </a:p>
           <a:p>
             <a:pPr lvl="4"/>
             <a:r>
-              <a:rPr lang="zh-TW" altLang="en-US" smtClean="0"/>
+              <a:rPr lang="zh-TW" altLang="en-US"/>
               <a:t>第五層</a:t>
             </a:r>
-            <a:endParaRPr lang="zh-TW" altLang="en-US"/>
           </a:p>
         </p:txBody>
       </p:sp>
@@ -654,7 +648,7 @@
           <a:p>
             <a:fld id="{2739EEB5-7168-4F77-91E9-27903F5B1FCF}" type="datetimeFigureOut">
               <a:rPr lang="zh-TW" altLang="en-US" smtClean="0"/>
-              <a:t>2023/7/29</a:t>
+              <a:t>2025/7/19</a:t>
             </a:fld>
             <a:endParaRPr lang="zh-TW" altLang="en-US"/>
           </a:p>
@@ -743,10 +737,9 @@
           <a:lstStyle/>
           <a:p>
             <a:r>
-              <a:rPr lang="zh-TW" altLang="en-US" smtClean="0"/>
+              <a:rPr lang="zh-TW" altLang="en-US"/>
               <a:t>按一下以編輯母片標題樣式</a:t>
             </a:r>
-            <a:endParaRPr lang="zh-TW" altLang="en-US"/>
           </a:p>
         </p:txBody>
       </p:sp>
@@ -767,38 +760,37 @@
           <a:p>
             <a:pPr lvl="0"/>
             <a:r>
-              <a:rPr lang="zh-TW" altLang="en-US" smtClean="0"/>
+              <a:rPr lang="zh-TW" altLang="en-US"/>
               <a:t>按一下以編輯母片文字樣式</a:t>
             </a:r>
           </a:p>
           <a:p>
             <a:pPr lvl="1"/>
             <a:r>
-              <a:rPr lang="zh-TW" altLang="en-US" smtClean="0"/>
+              <a:rPr lang="zh-TW" altLang="en-US"/>
               <a:t>第二層</a:t>
             </a:r>
           </a:p>
           <a:p>
             <a:pPr lvl="2"/>
             <a:r>
-              <a:rPr lang="zh-TW" altLang="en-US" smtClean="0"/>
+              <a:rPr lang="zh-TW" altLang="en-US"/>
               <a:t>第三層</a:t>
             </a:r>
           </a:p>
           <a:p>
             <a:pPr lvl="3"/>
             <a:r>
-              <a:rPr lang="zh-TW" altLang="en-US" smtClean="0"/>
+              <a:rPr lang="zh-TW" altLang="en-US"/>
               <a:t>第四層</a:t>
             </a:r>
           </a:p>
           <a:p>
             <a:pPr lvl="4"/>
             <a:r>
-              <a:rPr lang="zh-TW" altLang="en-US" smtClean="0"/>
+              <a:rPr lang="zh-TW" altLang="en-US"/>
               <a:t>第五層</a:t>
             </a:r>
-            <a:endParaRPr lang="zh-TW" altLang="en-US"/>
           </a:p>
         </p:txBody>
       </p:sp>
@@ -819,7 +811,7 @@
           <a:p>
             <a:fld id="{2739EEB5-7168-4F77-91E9-27903F5B1FCF}" type="datetimeFigureOut">
               <a:rPr lang="zh-TW" altLang="en-US" smtClean="0"/>
-              <a:t>2023/7/29</a:t>
+              <a:t>2025/7/19</a:t>
             </a:fld>
             <a:endParaRPr lang="zh-TW" altLang="en-US"/>
           </a:p>
@@ -917,10 +909,9 @@
           </a:lstStyle>
           <a:p>
             <a:r>
-              <a:rPr lang="zh-TW" altLang="en-US" smtClean="0"/>
+              <a:rPr lang="zh-TW" altLang="en-US"/>
               <a:t>按一下以編輯母片標題樣式</a:t>
             </a:r>
-            <a:endParaRPr lang="zh-TW" altLang="en-US"/>
           </a:p>
         </p:txBody>
       </p:sp>
@@ -1037,7 +1028,7 @@
           <a:p>
             <a:pPr lvl="0"/>
             <a:r>
-              <a:rPr lang="zh-TW" altLang="en-US" smtClean="0"/>
+              <a:rPr lang="zh-TW" altLang="en-US"/>
               <a:t>按一下以編輯母片文字樣式</a:t>
             </a:r>
           </a:p>
@@ -1060,7 +1051,7 @@
           <a:p>
             <a:fld id="{2739EEB5-7168-4F77-91E9-27903F5B1FCF}" type="datetimeFigureOut">
               <a:rPr lang="zh-TW" altLang="en-US" smtClean="0"/>
-              <a:t>2023/7/29</a:t>
+              <a:t>2025/7/19</a:t>
             </a:fld>
             <a:endParaRPr lang="zh-TW" altLang="en-US"/>
           </a:p>
@@ -1149,10 +1140,9 @@
           <a:lstStyle/>
           <a:p>
             <a:r>
-              <a:rPr lang="zh-TW" altLang="en-US" smtClean="0"/>
+              <a:rPr lang="zh-TW" altLang="en-US"/>
               <a:t>按一下以編輯母片標題樣式</a:t>
             </a:r>
-            <a:endParaRPr lang="zh-TW" altLang="en-US"/>
           </a:p>
         </p:txBody>
       </p:sp>
@@ -1206,38 +1196,37 @@
           <a:p>
             <a:pPr lvl="0"/>
             <a:r>
-              <a:rPr lang="zh-TW" altLang="en-US" smtClean="0"/>
+              <a:rPr lang="zh-TW" altLang="en-US"/>
               <a:t>按一下以編輯母片文字樣式</a:t>
             </a:r>
           </a:p>
           <a:p>
             <a:pPr lvl="1"/>
             <a:r>
-              <a:rPr lang="zh-TW" altLang="en-US" smtClean="0"/>
+              <a:rPr lang="zh-TW" altLang="en-US"/>
               <a:t>第二層</a:t>
             </a:r>
           </a:p>
           <a:p>
             <a:pPr lvl="2"/>
             <a:r>
-              <a:rPr lang="zh-TW" altLang="en-US" smtClean="0"/>
+              <a:rPr lang="zh-TW" altLang="en-US"/>
               <a:t>第三層</a:t>
             </a:r>
           </a:p>
           <a:p>
             <a:pPr lvl="3"/>
             <a:r>
-              <a:rPr lang="zh-TW" altLang="en-US" smtClean="0"/>
+              <a:rPr lang="zh-TW" altLang="en-US"/>
               <a:t>第四層</a:t>
             </a:r>
           </a:p>
           <a:p>
             <a:pPr lvl="4"/>
             <a:r>
-              <a:rPr lang="zh-TW" altLang="en-US" smtClean="0"/>
+              <a:rPr lang="zh-TW" altLang="en-US"/>
               <a:t>第五層</a:t>
             </a:r>
-            <a:endParaRPr lang="zh-TW" altLang="en-US"/>
           </a:p>
         </p:txBody>
       </p:sp>
@@ -1291,38 +1280,37 @@
           <a:p>
             <a:pPr lvl="0"/>
             <a:r>
-              <a:rPr lang="zh-TW" altLang="en-US" smtClean="0"/>
+              <a:rPr lang="zh-TW" altLang="en-US"/>
               <a:t>按一下以編輯母片文字樣式</a:t>
             </a:r>
           </a:p>
           <a:p>
             <a:pPr lvl="1"/>
             <a:r>
-              <a:rPr lang="zh-TW" altLang="en-US" smtClean="0"/>
+              <a:rPr lang="zh-TW" altLang="en-US"/>
               <a:t>第二層</a:t>
             </a:r>
           </a:p>
           <a:p>
             <a:pPr lvl="2"/>
             <a:r>
-              <a:rPr lang="zh-TW" altLang="en-US" smtClean="0"/>
+              <a:rPr lang="zh-TW" altLang="en-US"/>
               <a:t>第三層</a:t>
             </a:r>
           </a:p>
           <a:p>
             <a:pPr lvl="3"/>
             <a:r>
-              <a:rPr lang="zh-TW" altLang="en-US" smtClean="0"/>
+              <a:rPr lang="zh-TW" altLang="en-US"/>
               <a:t>第四層</a:t>
             </a:r>
           </a:p>
           <a:p>
             <a:pPr lvl="4"/>
             <a:r>
-              <a:rPr lang="zh-TW" altLang="en-US" smtClean="0"/>
+              <a:rPr lang="zh-TW" altLang="en-US"/>
               <a:t>第五層</a:t>
             </a:r>
-            <a:endParaRPr lang="zh-TW" altLang="en-US"/>
           </a:p>
         </p:txBody>
       </p:sp>
@@ -1343,7 +1331,7 @@
           <a:p>
             <a:fld id="{2739EEB5-7168-4F77-91E9-27903F5B1FCF}" type="datetimeFigureOut">
               <a:rPr lang="zh-TW" altLang="en-US" smtClean="0"/>
-              <a:t>2023/7/29</a:t>
+              <a:t>2025/7/19</a:t>
             </a:fld>
             <a:endParaRPr lang="zh-TW" altLang="en-US"/>
           </a:p>
@@ -1436,10 +1424,9 @@
           </a:lstStyle>
           <a:p>
             <a:r>
-              <a:rPr lang="zh-TW" altLang="en-US" smtClean="0"/>
+              <a:rPr lang="zh-TW" altLang="en-US"/>
               <a:t>按一下以編輯母片標題樣式</a:t>
             </a:r>
-            <a:endParaRPr lang="zh-TW" altLang="en-US"/>
           </a:p>
         </p:txBody>
       </p:sp>
@@ -1502,7 +1489,7 @@
           <a:p>
             <a:pPr lvl="0"/>
             <a:r>
-              <a:rPr lang="zh-TW" altLang="en-US" smtClean="0"/>
+              <a:rPr lang="zh-TW" altLang="en-US"/>
               <a:t>按一下以編輯母片文字樣式</a:t>
             </a:r>
           </a:p>
@@ -1558,38 +1545,37 @@
           <a:p>
             <a:pPr lvl="0"/>
             <a:r>
-              <a:rPr lang="zh-TW" altLang="en-US" smtClean="0"/>
+              <a:rPr lang="zh-TW" altLang="en-US"/>
               <a:t>按一下以編輯母片文字樣式</a:t>
             </a:r>
           </a:p>
           <a:p>
             <a:pPr lvl="1"/>
             <a:r>
-              <a:rPr lang="zh-TW" altLang="en-US" smtClean="0"/>
+              <a:rPr lang="zh-TW" altLang="en-US"/>
               <a:t>第二層</a:t>
             </a:r>
           </a:p>
           <a:p>
             <a:pPr lvl="2"/>
             <a:r>
-              <a:rPr lang="zh-TW" altLang="en-US" smtClean="0"/>
+              <a:rPr lang="zh-TW" altLang="en-US"/>
               <a:t>第三層</a:t>
             </a:r>
           </a:p>
           <a:p>
             <a:pPr lvl="3"/>
             <a:r>
-              <a:rPr lang="zh-TW" altLang="en-US" smtClean="0"/>
+              <a:rPr lang="zh-TW" altLang="en-US"/>
               <a:t>第四層</a:t>
             </a:r>
           </a:p>
           <a:p>
             <a:pPr lvl="4"/>
             <a:r>
-              <a:rPr lang="zh-TW" altLang="en-US" smtClean="0"/>
+              <a:rPr lang="zh-TW" altLang="en-US"/>
               <a:t>第五層</a:t>
             </a:r>
-            <a:endParaRPr lang="zh-TW" altLang="en-US"/>
           </a:p>
         </p:txBody>
       </p:sp>
@@ -1652,7 +1638,7 @@
           <a:p>
             <a:pPr lvl="0"/>
             <a:r>
-              <a:rPr lang="zh-TW" altLang="en-US" smtClean="0"/>
+              <a:rPr lang="zh-TW" altLang="en-US"/>
               <a:t>按一下以編輯母片文字樣式</a:t>
             </a:r>
           </a:p>
@@ -1708,38 +1694,37 @@
           <a:p>
             <a:pPr lvl="0"/>
             <a:r>
-              <a:rPr lang="zh-TW" altLang="en-US" smtClean="0"/>
+              <a:rPr lang="zh-TW" altLang="en-US"/>
               <a:t>按一下以編輯母片文字樣式</a:t>
             </a:r>
           </a:p>
           <a:p>
             <a:pPr lvl="1"/>
             <a:r>
-              <a:rPr lang="zh-TW" altLang="en-US" smtClean="0"/>
+              <a:rPr lang="zh-TW" altLang="en-US"/>
               <a:t>第二層</a:t>
             </a:r>
           </a:p>
           <a:p>
             <a:pPr lvl="2"/>
             <a:r>
-              <a:rPr lang="zh-TW" altLang="en-US" smtClean="0"/>
+              <a:rPr lang="zh-TW" altLang="en-US"/>
               <a:t>第三層</a:t>
             </a:r>
           </a:p>
           <a:p>
             <a:pPr lvl="3"/>
             <a:r>
-              <a:rPr lang="zh-TW" altLang="en-US" smtClean="0"/>
+              <a:rPr lang="zh-TW" altLang="en-US"/>
               <a:t>第四層</a:t>
             </a:r>
           </a:p>
           <a:p>
             <a:pPr lvl="4"/>
             <a:r>
-              <a:rPr lang="zh-TW" altLang="en-US" smtClean="0"/>
+              <a:rPr lang="zh-TW" altLang="en-US"/>
               <a:t>第五層</a:t>
             </a:r>
-            <a:endParaRPr lang="zh-TW" altLang="en-US"/>
           </a:p>
         </p:txBody>
       </p:sp>
@@ -1760,7 +1745,7 @@
           <a:p>
             <a:fld id="{2739EEB5-7168-4F77-91E9-27903F5B1FCF}" type="datetimeFigureOut">
               <a:rPr lang="zh-TW" altLang="en-US" smtClean="0"/>
-              <a:t>2023/7/29</a:t>
+              <a:t>2025/7/19</a:t>
             </a:fld>
             <a:endParaRPr lang="zh-TW" altLang="en-US"/>
           </a:p>
@@ -1849,10 +1834,9 @@
           <a:lstStyle/>
           <a:p>
             <a:r>
-              <a:rPr lang="zh-TW" altLang="en-US" smtClean="0"/>
+              <a:rPr lang="zh-TW" altLang="en-US"/>
               <a:t>按一下以編輯母片標題樣式</a:t>
             </a:r>
-            <a:endParaRPr lang="zh-TW" altLang="en-US"/>
           </a:p>
         </p:txBody>
       </p:sp>
@@ -1873,7 +1857,7 @@
           <a:p>
             <a:fld id="{2739EEB5-7168-4F77-91E9-27903F5B1FCF}" type="datetimeFigureOut">
               <a:rPr lang="zh-TW" altLang="en-US" smtClean="0"/>
-              <a:t>2023/7/29</a:t>
+              <a:t>2025/7/19</a:t>
             </a:fld>
             <a:endParaRPr lang="zh-TW" altLang="en-US"/>
           </a:p>
@@ -1963,7 +1947,7 @@
           <a:p>
             <a:fld id="{2739EEB5-7168-4F77-91E9-27903F5B1FCF}" type="datetimeFigureOut">
               <a:rPr lang="zh-TW" altLang="en-US" smtClean="0"/>
-              <a:t>2023/7/29</a:t>
+              <a:t>2025/7/19</a:t>
             </a:fld>
             <a:endParaRPr lang="zh-TW" altLang="en-US"/>
           </a:p>
@@ -2061,10 +2045,9 @@
           </a:lstStyle>
           <a:p>
             <a:r>
-              <a:rPr lang="zh-TW" altLang="en-US" smtClean="0"/>
+              <a:rPr lang="zh-TW" altLang="en-US"/>
               <a:t>按一下以編輯母片標題樣式</a:t>
             </a:r>
-            <a:endParaRPr lang="zh-TW" altLang="en-US"/>
           </a:p>
         </p:txBody>
       </p:sp>
@@ -2118,38 +2101,37 @@
           <a:p>
             <a:pPr lvl="0"/>
             <a:r>
-              <a:rPr lang="zh-TW" altLang="en-US" smtClean="0"/>
+              <a:rPr lang="zh-TW" altLang="en-US"/>
               <a:t>按一下以編輯母片文字樣式</a:t>
             </a:r>
           </a:p>
           <a:p>
             <a:pPr lvl="1"/>
             <a:r>
-              <a:rPr lang="zh-TW" altLang="en-US" smtClean="0"/>
+              <a:rPr lang="zh-TW" altLang="en-US"/>
               <a:t>第二層</a:t>
             </a:r>
           </a:p>
           <a:p>
             <a:pPr lvl="2"/>
             <a:r>
-              <a:rPr lang="zh-TW" altLang="en-US" smtClean="0"/>
+              <a:rPr lang="zh-TW" altLang="en-US"/>
               <a:t>第三層</a:t>
             </a:r>
           </a:p>
           <a:p>
             <a:pPr lvl="3"/>
             <a:r>
-              <a:rPr lang="zh-TW" altLang="en-US" smtClean="0"/>
+              <a:rPr lang="zh-TW" altLang="en-US"/>
               <a:t>第四層</a:t>
             </a:r>
           </a:p>
           <a:p>
             <a:pPr lvl="4"/>
             <a:r>
-              <a:rPr lang="zh-TW" altLang="en-US" smtClean="0"/>
+              <a:rPr lang="zh-TW" altLang="en-US"/>
               <a:t>第五層</a:t>
             </a:r>
-            <a:endParaRPr lang="zh-TW" altLang="en-US"/>
           </a:p>
         </p:txBody>
       </p:sp>
@@ -2212,7 +2194,7 @@
           <a:p>
             <a:pPr lvl="0"/>
             <a:r>
-              <a:rPr lang="zh-TW" altLang="en-US" smtClean="0"/>
+              <a:rPr lang="zh-TW" altLang="en-US"/>
               <a:t>按一下以編輯母片文字樣式</a:t>
             </a:r>
           </a:p>
@@ -2235,7 +2217,7 @@
           <a:p>
             <a:fld id="{2739EEB5-7168-4F77-91E9-27903F5B1FCF}" type="datetimeFigureOut">
               <a:rPr lang="zh-TW" altLang="en-US" smtClean="0"/>
-              <a:t>2023/7/29</a:t>
+              <a:t>2025/7/19</a:t>
             </a:fld>
             <a:endParaRPr lang="zh-TW" altLang="en-US"/>
           </a:p>
@@ -2333,10 +2315,9 @@
           </a:lstStyle>
           <a:p>
             <a:r>
-              <a:rPr lang="zh-TW" altLang="en-US" smtClean="0"/>
+              <a:rPr lang="zh-TW" altLang="en-US"/>
               <a:t>按一下以編輯母片標題樣式</a:t>
             </a:r>
-            <a:endParaRPr lang="zh-TW" altLang="en-US"/>
           </a:p>
         </p:txBody>
       </p:sp>
@@ -2398,10 +2379,9 @@
           </a:lstStyle>
           <a:p>
             <a:r>
-              <a:rPr lang="zh-TW" altLang="en-US" smtClean="0"/>
+              <a:rPr lang="zh-TW" altLang="en-US"/>
               <a:t>按一下圖示以新增圖片</a:t>
             </a:r>
-            <a:endParaRPr lang="zh-TW" altLang="en-US"/>
           </a:p>
         </p:txBody>
       </p:sp>
@@ -2464,7 +2444,7 @@
           <a:p>
             <a:pPr lvl="0"/>
             <a:r>
-              <a:rPr lang="zh-TW" altLang="en-US" smtClean="0"/>
+              <a:rPr lang="zh-TW" altLang="en-US"/>
               <a:t>按一下以編輯母片文字樣式</a:t>
             </a:r>
           </a:p>
@@ -2487,7 +2467,7 @@
           <a:p>
             <a:fld id="{2739EEB5-7168-4F77-91E9-27903F5B1FCF}" type="datetimeFigureOut">
               <a:rPr lang="zh-TW" altLang="en-US" smtClean="0"/>
-              <a:t>2023/7/29</a:t>
+              <a:t>2025/7/19</a:t>
             </a:fld>
             <a:endParaRPr lang="zh-TW" altLang="en-US"/>
           </a:p>
@@ -2596,10 +2576,9 @@
           <a:lstStyle/>
           <a:p>
             <a:r>
-              <a:rPr lang="zh-TW" altLang="en-US" smtClean="0"/>
+              <a:rPr lang="zh-TW" altLang="en-US"/>
               <a:t>按一下以編輯母片標題樣式</a:t>
             </a:r>
-            <a:endParaRPr lang="zh-TW" altLang="en-US"/>
           </a:p>
         </p:txBody>
       </p:sp>
@@ -2630,38 +2609,37 @@
           <a:p>
             <a:pPr lvl="0"/>
             <a:r>
-              <a:rPr lang="zh-TW" altLang="en-US" smtClean="0"/>
+              <a:rPr lang="zh-TW" altLang="en-US"/>
               <a:t>按一下以編輯母片文字樣式</a:t>
             </a:r>
           </a:p>
           <a:p>
             <a:pPr lvl="1"/>
             <a:r>
-              <a:rPr lang="zh-TW" altLang="en-US" smtClean="0"/>
+              <a:rPr lang="zh-TW" altLang="en-US"/>
               <a:t>第二層</a:t>
             </a:r>
           </a:p>
           <a:p>
             <a:pPr lvl="2"/>
             <a:r>
-              <a:rPr lang="zh-TW" altLang="en-US" smtClean="0"/>
+              <a:rPr lang="zh-TW" altLang="en-US"/>
               <a:t>第三層</a:t>
             </a:r>
           </a:p>
           <a:p>
             <a:pPr lvl="3"/>
             <a:r>
-              <a:rPr lang="zh-TW" altLang="en-US" smtClean="0"/>
+              <a:rPr lang="zh-TW" altLang="en-US"/>
               <a:t>第四層</a:t>
             </a:r>
           </a:p>
           <a:p>
             <a:pPr lvl="4"/>
             <a:r>
-              <a:rPr lang="zh-TW" altLang="en-US" smtClean="0"/>
+              <a:rPr lang="zh-TW" altLang="en-US"/>
               <a:t>第五層</a:t>
             </a:r>
-            <a:endParaRPr lang="zh-TW" altLang="en-US"/>
           </a:p>
         </p:txBody>
       </p:sp>
@@ -2700,7 +2678,7 @@
           <a:p>
             <a:fld id="{2739EEB5-7168-4F77-91E9-27903F5B1FCF}" type="datetimeFigureOut">
               <a:rPr lang="zh-TW" altLang="en-US" smtClean="0"/>
-              <a:t>2023/7/29</a:t>
+              <a:t>2025/7/19</a:t>
             </a:fld>
             <a:endParaRPr lang="zh-TW" altLang="en-US"/>
           </a:p>
@@ -3107,27 +3085,10 @@
                 <a:latin typeface="微軟正黑體" pitchFamily="34" charset="-120"/>
                 <a:ea typeface="微軟正黑體" pitchFamily="34" charset="-120"/>
               </a:rPr>
-              <a:t>活著為要敬</a:t>
-            </a:r>
-            <a:r>
-              <a:rPr lang="zh-TW" altLang="en-US" sz="7200" b="1" i="1" dirty="0" smtClean="0">
-                <a:solidFill>
-                  <a:srgbClr val="000066"/>
-                </a:solidFill>
-                <a:effectLst>
-                  <a:outerShdw blurRad="38100" dist="38100" dir="2700000" algn="tl">
-                    <a:srgbClr val="000000">
-                      <a:alpha val="43137"/>
-                    </a:srgbClr>
-                  </a:outerShdw>
-                </a:effectLst>
-                <a:latin typeface="微軟正黑體" pitchFamily="34" charset="-120"/>
-                <a:ea typeface="微軟正黑體" pitchFamily="34" charset="-120"/>
-              </a:rPr>
-              <a:t>拜</a:t>
-            </a:r>
-            <a:r>
-              <a:rPr lang="zh-CN" altLang="en-US" sz="7200" b="1" i="1" dirty="0" smtClean="0">
+              <a:t>活著為要敬拜</a:t>
+            </a:r>
+            <a:r>
+              <a:rPr lang="zh-CN" altLang="en-US" sz="7200" b="1" i="1" dirty="0">
                 <a:solidFill>
                   <a:srgbClr val="000066"/>
                 </a:solidFill>
@@ -3223,20 +3184,10 @@
                 <a:latin typeface="微軟正黑體" pitchFamily="34" charset="-120"/>
                 <a:ea typeface="微軟正黑體" pitchFamily="34" charset="-120"/>
               </a:rPr>
-              <a:t>喔  我</a:t>
-            </a:r>
-            <a:r>
-              <a:rPr lang="zh-TW" altLang="en-US" sz="6400" b="1" dirty="0" smtClean="0">
-                <a:solidFill>
-                  <a:srgbClr val="000066"/>
-                </a:solidFill>
-                <a:latin typeface="微軟正黑體" pitchFamily="34" charset="-120"/>
-                <a:ea typeface="微軟正黑體" pitchFamily="34" charset="-120"/>
-              </a:rPr>
-              <a:t>愛</a:t>
-            </a:r>
-            <a:r>
-              <a:rPr lang="zh-CN" altLang="en-US" sz="6400" b="1" dirty="0" smtClean="0">
+              <a:t>喔  我愛</a:t>
+            </a:r>
+            <a:r>
+              <a:rPr lang="zh-CN" altLang="en-US" sz="6400" b="1" dirty="0">
                 <a:solidFill>
                   <a:srgbClr val="000066"/>
                 </a:solidFill>
@@ -3265,20 +3216,10 @@
                 <a:latin typeface="微軟正黑體" pitchFamily="34" charset="-120"/>
                 <a:ea typeface="微軟正黑體" pitchFamily="34" charset="-120"/>
               </a:rPr>
-              <a:t>喔  全心敬</a:t>
-            </a:r>
-            <a:r>
-              <a:rPr lang="zh-TW" altLang="en-US" sz="6400" b="1" dirty="0" smtClean="0">
-                <a:solidFill>
-                  <a:srgbClr val="000066"/>
-                </a:solidFill>
-                <a:latin typeface="微軟正黑體" pitchFamily="34" charset="-120"/>
-                <a:ea typeface="微軟正黑體" pitchFamily="34" charset="-120"/>
-              </a:rPr>
-              <a:t>拜</a:t>
-            </a:r>
-            <a:r>
-              <a:rPr lang="zh-CN" altLang="en-US" sz="6400" b="1" dirty="0" smtClean="0">
+              <a:t>喔  全心敬拜</a:t>
+            </a:r>
+            <a:r>
+              <a:rPr lang="zh-CN" altLang="en-US" sz="6400" b="1" dirty="0">
                 <a:solidFill>
                   <a:srgbClr val="000066"/>
                 </a:solidFill>
@@ -3325,61 +3266,45 @@
                 <a:solidFill>
                   <a:srgbClr val="000066"/>
                 </a:solidFill>
-                <a:effectLst/>
                 <a:latin typeface="Microsoft JhengHei" panose="020B0604030504040204" pitchFamily="34" charset="-120"/>
                 <a:ea typeface="Microsoft JhengHei" panose="020B0604030504040204" pitchFamily="34" charset="-120"/>
               </a:rPr>
               <a:t>( </a:t>
             </a:r>
             <a:r>
-              <a:rPr lang="zh-CN" altLang="en-US" sz="3600" b="1" dirty="0" smtClean="0">
-                <a:solidFill>
-                  <a:srgbClr val="000066"/>
-                </a:solidFill>
-                <a:effectLst/>
+              <a:rPr lang="zh-CN" altLang="en-US" sz="3600" b="1" dirty="0">
+                <a:solidFill>
+                  <a:srgbClr val="000066"/>
+                </a:solidFill>
                 <a:latin typeface="Microsoft JhengHei" panose="020B0604030504040204" pitchFamily="34" charset="-120"/>
                 <a:ea typeface="Microsoft JhengHei" panose="020B0604030504040204" pitchFamily="34" charset="-120"/>
               </a:rPr>
-              <a:t>副 </a:t>
+              <a:t>副歌 </a:t>
             </a:r>
             <a:r>
               <a:rPr lang="en-US" altLang="zh-CN" sz="3600" b="1" dirty="0">
                 <a:solidFill>
                   <a:srgbClr val="000066"/>
                 </a:solidFill>
-                <a:effectLst/>
                 <a:latin typeface="Microsoft JhengHei" panose="020B0604030504040204" pitchFamily="34" charset="-120"/>
                 <a:ea typeface="Microsoft JhengHei" panose="020B0604030504040204" pitchFamily="34" charset="-120"/>
               </a:rPr>
               <a:t>2</a:t>
             </a:r>
             <a:r>
-              <a:rPr lang="en-US" sz="3600" b="1" dirty="0" smtClean="0">
-                <a:solidFill>
-                  <a:srgbClr val="000066"/>
-                </a:solidFill>
-                <a:effectLst/>
+              <a:rPr lang="en-US" sz="3600" b="1" dirty="0">
+                <a:solidFill>
+                  <a:srgbClr val="000066"/>
+                </a:solidFill>
                 <a:latin typeface="Microsoft JhengHei" panose="020B0604030504040204" pitchFamily="34" charset="-120"/>
                 <a:ea typeface="Microsoft JhengHei" panose="020B0604030504040204" pitchFamily="34" charset="-120"/>
               </a:rPr>
-              <a:t> </a:t>
-            </a:r>
-            <a:r>
-              <a:rPr lang="en-US" sz="3600" b="1" dirty="0">
-                <a:solidFill>
-                  <a:srgbClr val="000066"/>
-                </a:solidFill>
-                <a:effectLst/>
-                <a:latin typeface="Microsoft JhengHei" panose="020B0604030504040204" pitchFamily="34" charset="-120"/>
-                <a:ea typeface="Microsoft JhengHei" panose="020B0604030504040204" pitchFamily="34" charset="-120"/>
-              </a:rPr>
-              <a:t>)</a:t>
+              <a:t> )</a:t>
             </a:r>
             <a:endParaRPr lang="vi-VN" sz="3600" b="1" dirty="0">
               <a:solidFill>
                 <a:srgbClr val="000066"/>
               </a:solidFill>
-              <a:effectLst/>
               <a:ea typeface="Microsoft JhengHei" panose="020B0604030504040204" pitchFamily="34" charset="-120"/>
             </a:endParaRPr>
           </a:p>
@@ -3470,50 +3395,30 @@
                 <a:latin typeface="微軟正黑體" pitchFamily="34" charset="-120"/>
                 <a:ea typeface="微軟正黑體" pitchFamily="34" charset="-120"/>
               </a:rPr>
-              <a:t>我</a:t>
-            </a:r>
-            <a:r>
-              <a:rPr lang="zh-TW" altLang="en-US" sz="6400" b="1" dirty="0" smtClean="0">
+              <a:t>我愛</a:t>
+            </a:r>
+            <a:r>
+              <a:rPr lang="zh-CN" altLang="en-US" sz="6400" b="1" dirty="0">
                 <a:solidFill>
                   <a:srgbClr val="000066"/>
                 </a:solidFill>
                 <a:latin typeface="微軟正黑體" pitchFamily="34" charset="-120"/>
                 <a:ea typeface="微軟正黑體" pitchFamily="34" charset="-120"/>
               </a:rPr>
-              <a:t>愛</a:t>
-            </a:r>
-            <a:r>
-              <a:rPr lang="zh-CN" altLang="en-US" sz="6400" b="1" dirty="0" smtClean="0">
+              <a:t>祢  </a:t>
+            </a:r>
+            <a:r>
+              <a:rPr lang="zh-TW" altLang="en-US" sz="6400" b="1" dirty="0">
                 <a:solidFill>
                   <a:srgbClr val="000066"/>
                 </a:solidFill>
                 <a:latin typeface="微軟正黑體" pitchFamily="34" charset="-120"/>
                 <a:ea typeface="微軟正黑體" pitchFamily="34" charset="-120"/>
               </a:rPr>
-              <a:t>祢  </a:t>
-            </a:r>
-            <a:r>
-              <a:rPr lang="zh-TW" altLang="en-US" sz="6400" b="1" dirty="0">
-                <a:solidFill>
-                  <a:srgbClr val="000066"/>
-                </a:solidFill>
-                <a:latin typeface="微軟正黑體" pitchFamily="34" charset="-120"/>
-                <a:ea typeface="微軟正黑體" pitchFamily="34" charset="-120"/>
-              </a:rPr>
-              <a:t>我</a:t>
-            </a:r>
-            <a:r>
-              <a:rPr lang="zh-TW" altLang="en-US" sz="6400" b="1" dirty="0" smtClean="0">
-                <a:solidFill>
-                  <a:srgbClr val="000066"/>
-                </a:solidFill>
-                <a:latin typeface="微軟正黑體" pitchFamily="34" charset="-120"/>
-                <a:ea typeface="微軟正黑體" pitchFamily="34" charset="-120"/>
-              </a:rPr>
-              <a:t>愛</a:t>
-            </a:r>
-            <a:r>
-              <a:rPr lang="zh-CN" altLang="en-US" sz="6400" b="1" dirty="0" smtClean="0">
+              <a:t>我愛</a:t>
+            </a:r>
+            <a:r>
+              <a:rPr lang="zh-CN" altLang="en-US" sz="6400" b="1" dirty="0">
                 <a:solidFill>
                   <a:srgbClr val="000066"/>
                 </a:solidFill>
@@ -3560,61 +3465,45 @@
                 <a:solidFill>
                   <a:srgbClr val="000066"/>
                 </a:solidFill>
-                <a:effectLst/>
                 <a:latin typeface="Microsoft JhengHei" panose="020B0604030504040204" pitchFamily="34" charset="-120"/>
                 <a:ea typeface="Microsoft JhengHei" panose="020B0604030504040204" pitchFamily="34" charset="-120"/>
               </a:rPr>
               <a:t>( </a:t>
             </a:r>
             <a:r>
-              <a:rPr lang="zh-CN" altLang="en-US" sz="3600" b="1" dirty="0" smtClean="0">
-                <a:solidFill>
-                  <a:srgbClr val="000066"/>
-                </a:solidFill>
-                <a:effectLst/>
+              <a:rPr lang="zh-CN" altLang="en-US" sz="3600" b="1" dirty="0">
+                <a:solidFill>
+                  <a:srgbClr val="000066"/>
+                </a:solidFill>
                 <a:latin typeface="Microsoft JhengHei" panose="020B0604030504040204" pitchFamily="34" charset="-120"/>
                 <a:ea typeface="Microsoft JhengHei" panose="020B0604030504040204" pitchFamily="34" charset="-120"/>
               </a:rPr>
-              <a:t>副 </a:t>
+              <a:t>副歌 </a:t>
             </a:r>
             <a:r>
               <a:rPr lang="en-US" altLang="zh-CN" sz="3600" b="1" dirty="0">
                 <a:solidFill>
                   <a:srgbClr val="000066"/>
                 </a:solidFill>
-                <a:effectLst/>
                 <a:latin typeface="Microsoft JhengHei" panose="020B0604030504040204" pitchFamily="34" charset="-120"/>
                 <a:ea typeface="Microsoft JhengHei" panose="020B0604030504040204" pitchFamily="34" charset="-120"/>
               </a:rPr>
               <a:t>2</a:t>
             </a:r>
             <a:r>
-              <a:rPr lang="en-US" sz="3600" b="1" dirty="0" smtClean="0">
-                <a:solidFill>
-                  <a:srgbClr val="000066"/>
-                </a:solidFill>
-                <a:effectLst/>
+              <a:rPr lang="en-US" sz="3600" b="1" dirty="0">
+                <a:solidFill>
+                  <a:srgbClr val="000066"/>
+                </a:solidFill>
                 <a:latin typeface="Microsoft JhengHei" panose="020B0604030504040204" pitchFamily="34" charset="-120"/>
                 <a:ea typeface="Microsoft JhengHei" panose="020B0604030504040204" pitchFamily="34" charset="-120"/>
               </a:rPr>
-              <a:t> </a:t>
-            </a:r>
-            <a:r>
-              <a:rPr lang="en-US" sz="3600" b="1" dirty="0">
-                <a:solidFill>
-                  <a:srgbClr val="000066"/>
-                </a:solidFill>
-                <a:effectLst/>
-                <a:latin typeface="Microsoft JhengHei" panose="020B0604030504040204" pitchFamily="34" charset="-120"/>
-                <a:ea typeface="Microsoft JhengHei" panose="020B0604030504040204" pitchFamily="34" charset="-120"/>
-              </a:rPr>
-              <a:t>)</a:t>
+              <a:t> )</a:t>
             </a:r>
             <a:endParaRPr lang="vi-VN" sz="3600" b="1" dirty="0">
               <a:solidFill>
                 <a:srgbClr val="000066"/>
               </a:solidFill>
-              <a:effectLst/>
               <a:ea typeface="Microsoft JhengHei" panose="020B0604030504040204" pitchFamily="34" charset="-120"/>
             </a:endParaRPr>
           </a:p>
@@ -3683,20 +3572,10 @@
                 <a:latin typeface="微軟正黑體" pitchFamily="34" charset="-120"/>
                 <a:ea typeface="微軟正黑體" pitchFamily="34" charset="-120"/>
               </a:rPr>
-              <a:t>開我的眼睛  讓我看</a:t>
-            </a:r>
-            <a:r>
-              <a:rPr lang="zh-TW" altLang="en-US" sz="6400" b="1" dirty="0" smtClean="0">
-                <a:solidFill>
-                  <a:srgbClr val="000066"/>
-                </a:solidFill>
-                <a:latin typeface="微軟正黑體" pitchFamily="34" charset="-120"/>
-                <a:ea typeface="微軟正黑體" pitchFamily="34" charset="-120"/>
-              </a:rPr>
-              <a:t>見</a:t>
-            </a:r>
-            <a:r>
-              <a:rPr lang="zh-CN" altLang="en-US" sz="6400" b="1" dirty="0" smtClean="0">
+              <a:t>開我的眼睛  讓我看見</a:t>
+            </a:r>
+            <a:r>
+              <a:rPr lang="zh-CN" altLang="en-US" sz="6400" b="1" dirty="0">
                 <a:solidFill>
                   <a:srgbClr val="000066"/>
                 </a:solidFill>
@@ -3718,7 +3597,7 @@
               <a:buNone/>
             </a:pPr>
             <a:r>
-              <a:rPr lang="zh-CN" altLang="en-US" sz="6400" b="1" dirty="0" smtClean="0">
+              <a:rPr lang="zh-CN" altLang="en-US" sz="6400" b="1" dirty="0">
                 <a:solidFill>
                   <a:srgbClr val="000066"/>
                 </a:solidFill>
@@ -3728,24 +3607,14 @@
               <a:t>祢</a:t>
             </a:r>
             <a:r>
-              <a:rPr lang="zh-TW" altLang="en-US" sz="6400" b="1" dirty="0" smtClean="0">
+              <a:rPr lang="zh-TW" altLang="en-US" sz="6400" b="1" dirty="0">
                 <a:solidFill>
                   <a:srgbClr val="000066"/>
                 </a:solidFill>
                 <a:latin typeface="微軟正黑體" pitchFamily="34" charset="-120"/>
                 <a:ea typeface="微軟正黑體" pitchFamily="34" charset="-120"/>
               </a:rPr>
-              <a:t>榮</a:t>
-            </a:r>
-            <a:r>
-              <a:rPr lang="zh-TW" altLang="en-US" sz="6400" b="1" dirty="0">
-                <a:solidFill>
-                  <a:srgbClr val="000066"/>
-                </a:solidFill>
-                <a:latin typeface="微軟正黑體" pitchFamily="34" charset="-120"/>
-                <a:ea typeface="微軟正黑體" pitchFamily="34" charset="-120"/>
-              </a:rPr>
-              <a:t>美彰顯吸引我心</a:t>
+              <a:t>榮美彰顯吸引我心</a:t>
             </a:r>
             <a:endParaRPr lang="en-US" altLang="zh-TW" sz="6400" b="1" dirty="0">
               <a:solidFill>
@@ -3800,7 +3669,7 @@
                 <a:latin typeface="Microsoft JhengHei" panose="020B0604030504040204" pitchFamily="34" charset="-120"/>
                 <a:ea typeface="Microsoft JhengHei" panose="020B0604030504040204" pitchFamily="34" charset="-120"/>
               </a:rPr>
-              <a:t>正</a:t>
+              <a:t>正歌</a:t>
             </a:r>
             <a:r>
               <a:rPr lang="en-US" sz="3600" b="1" dirty="0">
@@ -3886,20 +3755,10 @@
                 <a:latin typeface="微軟正黑體" pitchFamily="34" charset="-120"/>
                 <a:ea typeface="微軟正黑體" pitchFamily="34" charset="-120"/>
               </a:rPr>
-              <a:t>開我的耳朵  讓我聽</a:t>
-            </a:r>
-            <a:r>
-              <a:rPr lang="zh-TW" altLang="en-US" sz="6400" b="1" dirty="0" smtClean="0">
-                <a:solidFill>
-                  <a:srgbClr val="000066"/>
-                </a:solidFill>
-                <a:latin typeface="微軟正黑體" pitchFamily="34" charset="-120"/>
-                <a:ea typeface="微軟正黑體" pitchFamily="34" charset="-120"/>
-              </a:rPr>
-              <a:t>見</a:t>
-            </a:r>
-            <a:r>
-              <a:rPr lang="zh-CN" altLang="en-US" sz="6400" b="1" dirty="0" smtClean="0">
+              <a:t>開我的耳朵  讓我聽見</a:t>
+            </a:r>
+            <a:r>
+              <a:rPr lang="zh-CN" altLang="en-US" sz="6400" b="1" dirty="0">
                 <a:solidFill>
                   <a:srgbClr val="000066"/>
                 </a:solidFill>
@@ -3928,20 +3787,10 @@
                 <a:latin typeface="微軟正黑體" pitchFamily="34" charset="-120"/>
                 <a:ea typeface="微軟正黑體" pitchFamily="34" charset="-120"/>
               </a:rPr>
-              <a:t>每句話都讓我更</a:t>
-            </a:r>
-            <a:r>
-              <a:rPr lang="zh-TW" altLang="en-US" sz="6400" b="1" dirty="0" smtClean="0">
-                <a:solidFill>
-                  <a:srgbClr val="000066"/>
-                </a:solidFill>
-                <a:latin typeface="微軟正黑體" pitchFamily="34" charset="-120"/>
-                <a:ea typeface="微軟正黑體" pitchFamily="34" charset="-120"/>
-              </a:rPr>
-              <a:t>愛</a:t>
-            </a:r>
-            <a:r>
-              <a:rPr lang="zh-CN" altLang="en-US" sz="6400" b="1" dirty="0" smtClean="0">
+              <a:t>每句話都讓我更愛</a:t>
+            </a:r>
+            <a:r>
+              <a:rPr lang="zh-CN" altLang="en-US" sz="6400" b="1" dirty="0">
                 <a:solidFill>
                   <a:srgbClr val="000066"/>
                 </a:solidFill>
@@ -3988,7 +3837,6 @@
                 <a:solidFill>
                   <a:srgbClr val="000066"/>
                 </a:solidFill>
-                <a:effectLst/>
                 <a:latin typeface="Microsoft JhengHei" panose="020B0604030504040204" pitchFamily="34" charset="-120"/>
                 <a:ea typeface="Microsoft JhengHei" panose="020B0604030504040204" pitchFamily="34" charset="-120"/>
               </a:rPr>
@@ -3999,18 +3847,16 @@
                 <a:solidFill>
                   <a:srgbClr val="000066"/>
                 </a:solidFill>
-                <a:effectLst/>
                 <a:latin typeface="Microsoft JhengHei" panose="020B0604030504040204" pitchFamily="34" charset="-120"/>
                 <a:ea typeface="Microsoft JhengHei" panose="020B0604030504040204" pitchFamily="34" charset="-120"/>
               </a:rPr>
-              <a:t>正</a:t>
+              <a:t>正歌</a:t>
             </a:r>
             <a:r>
               <a:rPr lang="en-US" sz="3600" b="1" dirty="0">
                 <a:solidFill>
                   <a:srgbClr val="000066"/>
                 </a:solidFill>
-                <a:effectLst/>
                 <a:latin typeface="Microsoft JhengHei" panose="020B0604030504040204" pitchFamily="34" charset="-120"/>
                 <a:ea typeface="Microsoft JhengHei" panose="020B0604030504040204" pitchFamily="34" charset="-120"/>
               </a:rPr>
@@ -4020,7 +3866,6 @@
               <a:solidFill>
                 <a:srgbClr val="000066"/>
               </a:solidFill>
-              <a:effectLst/>
               <a:ea typeface="Microsoft JhengHei" panose="020B0604030504040204" pitchFamily="34" charset="-120"/>
             </a:endParaRPr>
           </a:p>
@@ -4089,20 +3934,10 @@
                 <a:latin typeface="微軟正黑體" pitchFamily="34" charset="-120"/>
                 <a:ea typeface="微軟正黑體" pitchFamily="34" charset="-120"/>
               </a:rPr>
-              <a:t>活著為要敬</a:t>
-            </a:r>
-            <a:r>
-              <a:rPr lang="zh-TW" altLang="en-US" sz="6400" b="1" dirty="0" smtClean="0">
-                <a:solidFill>
-                  <a:srgbClr val="000066"/>
-                </a:solidFill>
-                <a:latin typeface="微軟正黑體" pitchFamily="34" charset="-120"/>
-                <a:ea typeface="微軟正黑體" pitchFamily="34" charset="-120"/>
-              </a:rPr>
-              <a:t>拜</a:t>
-            </a:r>
-            <a:r>
-              <a:rPr lang="zh-CN" altLang="en-US" sz="6400" b="1" dirty="0" smtClean="0">
+              <a:t>活著為要敬拜</a:t>
+            </a:r>
+            <a:r>
+              <a:rPr lang="zh-CN" altLang="en-US" sz="6400" b="1" dirty="0">
                 <a:solidFill>
                   <a:srgbClr val="000066"/>
                 </a:solidFill>
@@ -4131,20 +3966,10 @@
                 <a:latin typeface="微軟正黑體" pitchFamily="34" charset="-120"/>
                 <a:ea typeface="微軟正黑體" pitchFamily="34" charset="-120"/>
               </a:rPr>
-              <a:t>活著為要全心來</a:t>
-            </a:r>
-            <a:r>
-              <a:rPr lang="zh-TW" altLang="en-US" sz="6400" b="1" dirty="0" smtClean="0">
-                <a:solidFill>
-                  <a:srgbClr val="000066"/>
-                </a:solidFill>
-                <a:latin typeface="微軟正黑體" pitchFamily="34" charset="-120"/>
-                <a:ea typeface="微軟正黑體" pitchFamily="34" charset="-120"/>
-              </a:rPr>
-              <a:t>愛</a:t>
-            </a:r>
-            <a:r>
-              <a:rPr lang="zh-CN" altLang="en-US" sz="6400" b="1" dirty="0" smtClean="0">
+              <a:t>活著為要全心來愛</a:t>
+            </a:r>
+            <a:r>
+              <a:rPr lang="zh-CN" altLang="en-US" sz="6400" b="1" dirty="0">
                 <a:solidFill>
                   <a:srgbClr val="000066"/>
                 </a:solidFill>
@@ -4198,7 +4023,7 @@
               <a:t>( </a:t>
             </a:r>
             <a:r>
-              <a:rPr lang="zh-CN" altLang="en-US" sz="3600" b="1" dirty="0" smtClean="0">
+              <a:rPr lang="zh-CN" altLang="en-US" sz="3600" b="1" dirty="0">
                 <a:solidFill>
                   <a:srgbClr val="000066"/>
                 </a:solidFill>
@@ -4209,7 +4034,17 @@
               <a:t>副</a:t>
             </a:r>
             <a:r>
-              <a:rPr lang="en-US" sz="3600" b="1" dirty="0" smtClean="0">
+              <a:rPr lang="zh-CN" altLang="en-US" sz="3600" b="1" dirty="0">
+                <a:solidFill>
+                  <a:srgbClr val="000066"/>
+                </a:solidFill>
+                <a:latin typeface="Microsoft JhengHei" panose="020B0604030504040204" pitchFamily="34" charset="-120"/>
+                <a:ea typeface="Microsoft JhengHei" panose="020B0604030504040204" pitchFamily="34" charset="-120"/>
+              </a:rPr>
+              <a:t>歌</a:t>
+            </a:r>
+            <a:r>
+              <a:rPr lang="en-US" sz="3600" b="1" dirty="0">
                 <a:solidFill>
                   <a:srgbClr val="000066"/>
                 </a:solidFill>
@@ -4217,18 +4052,7 @@
                 <a:latin typeface="Microsoft JhengHei" panose="020B0604030504040204" pitchFamily="34" charset="-120"/>
                 <a:ea typeface="Microsoft JhengHei" panose="020B0604030504040204" pitchFamily="34" charset="-120"/>
               </a:rPr>
-              <a:t> </a:t>
-            </a:r>
-            <a:r>
-              <a:rPr lang="en-US" sz="3600" b="1" dirty="0">
-                <a:solidFill>
-                  <a:srgbClr val="000066"/>
-                </a:solidFill>
-                <a:effectLst/>
-                <a:latin typeface="Microsoft JhengHei" panose="020B0604030504040204" pitchFamily="34" charset="-120"/>
-                <a:ea typeface="Microsoft JhengHei" panose="020B0604030504040204" pitchFamily="34" charset="-120"/>
-              </a:rPr>
-              <a:t>)</a:t>
+              <a:t> )</a:t>
             </a:r>
             <a:endParaRPr lang="vi-VN" sz="3600" b="1" dirty="0">
               <a:solidFill>
@@ -4303,47 +4127,27 @@
                 <a:latin typeface="微軟正黑體" pitchFamily="34" charset="-120"/>
                 <a:ea typeface="微軟正黑體" pitchFamily="34" charset="-120"/>
               </a:rPr>
-              <a:t>俯伏</a:t>
-            </a:r>
-            <a:r>
-              <a:rPr lang="zh-TW" altLang="en-US" sz="6400" b="1" dirty="0" smtClean="0">
+              <a:t>俯伏在</a:t>
+            </a:r>
+            <a:r>
+              <a:rPr lang="zh-CN" altLang="en-US" sz="6400" b="1" dirty="0">
                 <a:solidFill>
                   <a:srgbClr val="000066"/>
                 </a:solidFill>
                 <a:latin typeface="微軟正黑體" pitchFamily="34" charset="-120"/>
                 <a:ea typeface="微軟正黑體" pitchFamily="34" charset="-120"/>
               </a:rPr>
-              <a:t>在</a:t>
-            </a:r>
-            <a:r>
-              <a:rPr lang="zh-CN" altLang="en-US" sz="6400" b="1" dirty="0" smtClean="0">
+              <a:t>祢</a:t>
+            </a:r>
+            <a:r>
+              <a:rPr lang="zh-TW" altLang="en-US" sz="6400" b="1" dirty="0">
                 <a:solidFill>
                   <a:srgbClr val="000066"/>
                 </a:solidFill>
                 <a:latin typeface="微軟正黑體" pitchFamily="34" charset="-120"/>
                 <a:ea typeface="微軟正黑體" pitchFamily="34" charset="-120"/>
               </a:rPr>
-              <a:t>祢</a:t>
-            </a:r>
-            <a:r>
-              <a:rPr lang="zh-TW" altLang="en-US" sz="6400" b="1" dirty="0" smtClean="0">
-                <a:solidFill>
-                  <a:srgbClr val="000066"/>
-                </a:solidFill>
-                <a:latin typeface="微軟正黑體" pitchFamily="34" charset="-120"/>
-                <a:ea typeface="微軟正黑體" pitchFamily="34" charset="-120"/>
-              </a:rPr>
-              <a:t>榮</a:t>
-            </a:r>
-            <a:r>
-              <a:rPr lang="zh-TW" altLang="en-US" sz="6400" b="1" dirty="0">
-                <a:solidFill>
-                  <a:srgbClr val="000066"/>
-                </a:solidFill>
-                <a:latin typeface="微軟正黑體" pitchFamily="34" charset="-120"/>
-                <a:ea typeface="微軟正黑體" pitchFamily="34" charset="-120"/>
-              </a:rPr>
-              <a:t>耀中</a:t>
+              <a:t>榮耀中</a:t>
             </a:r>
             <a:endParaRPr lang="en-US" altLang="zh-TW" sz="6400" b="1" dirty="0">
               <a:solidFill>
@@ -4358,7 +4162,7 @@
               <a:buNone/>
             </a:pPr>
             <a:r>
-              <a:rPr lang="zh-CN" altLang="en-US" sz="6400" b="1" dirty="0" smtClean="0">
+              <a:rPr lang="zh-CN" altLang="en-US" sz="6400" b="1" dirty="0">
                 <a:solidFill>
                   <a:srgbClr val="000066"/>
                 </a:solidFill>
@@ -4368,24 +4172,14 @@
               <a:t>祢</a:t>
             </a:r>
             <a:r>
-              <a:rPr lang="zh-TW" altLang="en-US" sz="6400" b="1" dirty="0" smtClean="0">
+              <a:rPr lang="zh-TW" altLang="en-US" sz="6400" b="1" dirty="0">
                 <a:solidFill>
                   <a:srgbClr val="000066"/>
                 </a:solidFill>
                 <a:latin typeface="微軟正黑體" pitchFamily="34" charset="-120"/>
                 <a:ea typeface="微軟正黑體" pitchFamily="34" charset="-120"/>
               </a:rPr>
-              <a:t>的</a:t>
-            </a:r>
-            <a:r>
-              <a:rPr lang="zh-TW" altLang="en-US" sz="6400" b="1" dirty="0">
-                <a:solidFill>
-                  <a:srgbClr val="000066"/>
-                </a:solidFill>
-                <a:latin typeface="微軟正黑體" pitchFamily="34" charset="-120"/>
-                <a:ea typeface="微軟正黑體" pitchFamily="34" charset="-120"/>
-              </a:rPr>
-              <a:t>榮美無人能及</a:t>
+              <a:t>的榮美無人能及</a:t>
             </a:r>
           </a:p>
         </p:txBody>
@@ -4418,50 +4212,35 @@
                 <a:solidFill>
                   <a:srgbClr val="000066"/>
                 </a:solidFill>
-                <a:effectLst/>
                 <a:latin typeface="Microsoft JhengHei" panose="020B0604030504040204" pitchFamily="34" charset="-120"/>
                 <a:ea typeface="Microsoft JhengHei" panose="020B0604030504040204" pitchFamily="34" charset="-120"/>
               </a:rPr>
               <a:t>( </a:t>
             </a:r>
             <a:r>
-              <a:rPr lang="zh-CN" altLang="en-US" sz="3600" b="1" dirty="0" smtClean="0">
-                <a:solidFill>
-                  <a:srgbClr val="000066"/>
-                </a:solidFill>
-                <a:effectLst/>
+              <a:rPr lang="zh-CN" altLang="en-US" sz="3600" b="1" dirty="0">
+                <a:solidFill>
+                  <a:srgbClr val="000066"/>
+                </a:solidFill>
                 <a:latin typeface="Microsoft JhengHei" panose="020B0604030504040204" pitchFamily="34" charset="-120"/>
                 <a:ea typeface="Microsoft JhengHei" panose="020B0604030504040204" pitchFamily="34" charset="-120"/>
               </a:rPr>
-              <a:t>副</a:t>
-            </a:r>
-            <a:r>
-              <a:rPr lang="en-US" sz="3600" b="1" dirty="0" smtClean="0">
-                <a:solidFill>
-                  <a:srgbClr val="000066"/>
-                </a:solidFill>
-                <a:effectLst/>
+              <a:t>副歌</a:t>
+            </a:r>
+            <a:r>
+              <a:rPr lang="en-US" sz="3600" b="1" dirty="0">
+                <a:solidFill>
+                  <a:srgbClr val="000066"/>
+                </a:solidFill>
                 <a:latin typeface="Microsoft JhengHei" panose="020B0604030504040204" pitchFamily="34" charset="-120"/>
                 <a:ea typeface="Microsoft JhengHei" panose="020B0604030504040204" pitchFamily="34" charset="-120"/>
               </a:rPr>
-              <a:t> </a:t>
-            </a:r>
-            <a:r>
-              <a:rPr lang="en-US" sz="3600" b="1" dirty="0">
-                <a:solidFill>
-                  <a:srgbClr val="000066"/>
-                </a:solidFill>
-                <a:effectLst/>
-                <a:latin typeface="Microsoft JhengHei" panose="020B0604030504040204" pitchFamily="34" charset="-120"/>
-                <a:ea typeface="Microsoft JhengHei" panose="020B0604030504040204" pitchFamily="34" charset="-120"/>
-              </a:rPr>
-              <a:t>)</a:t>
+              <a:t> )</a:t>
             </a:r>
             <a:endParaRPr lang="vi-VN" sz="3600" b="1" dirty="0">
               <a:solidFill>
                 <a:srgbClr val="000066"/>
               </a:solidFill>
-              <a:effectLst/>
               <a:ea typeface="Microsoft JhengHei" panose="020B0604030504040204" pitchFamily="34" charset="-120"/>
             </a:endParaRPr>
           </a:p>
@@ -4530,20 +4309,10 @@
                 <a:latin typeface="微軟正黑體" pitchFamily="34" charset="-120"/>
                 <a:ea typeface="微軟正黑體" pitchFamily="34" charset="-120"/>
               </a:rPr>
-              <a:t>活著為要敬</a:t>
-            </a:r>
-            <a:r>
-              <a:rPr lang="zh-TW" altLang="en-US" sz="6400" b="1" dirty="0" smtClean="0">
-                <a:solidFill>
-                  <a:srgbClr val="000066"/>
-                </a:solidFill>
-                <a:latin typeface="微軟正黑體" pitchFamily="34" charset="-120"/>
-                <a:ea typeface="微軟正黑體" pitchFamily="34" charset="-120"/>
-              </a:rPr>
-              <a:t>拜</a:t>
-            </a:r>
-            <a:r>
-              <a:rPr lang="zh-CN" altLang="en-US" sz="6400" b="1" dirty="0" smtClean="0">
+              <a:t>活著為要敬拜</a:t>
+            </a:r>
+            <a:r>
+              <a:rPr lang="zh-CN" altLang="en-US" sz="6400" b="1" dirty="0">
                 <a:solidFill>
                   <a:srgbClr val="000066"/>
                 </a:solidFill>
@@ -4572,20 +4341,10 @@
                 <a:latin typeface="微軟正黑體" pitchFamily="34" charset="-120"/>
                 <a:ea typeface="微軟正黑體" pitchFamily="34" charset="-120"/>
               </a:rPr>
-              <a:t>活著為要全心來</a:t>
-            </a:r>
-            <a:r>
-              <a:rPr lang="zh-TW" altLang="en-US" sz="6400" b="1" dirty="0" smtClean="0">
-                <a:solidFill>
-                  <a:srgbClr val="000066"/>
-                </a:solidFill>
-                <a:latin typeface="微軟正黑體" pitchFamily="34" charset="-120"/>
-                <a:ea typeface="微軟正黑體" pitchFamily="34" charset="-120"/>
-              </a:rPr>
-              <a:t>愛</a:t>
-            </a:r>
-            <a:r>
-              <a:rPr lang="zh-CN" altLang="en-US" sz="6400" b="1" dirty="0" smtClean="0">
+              <a:t>活著為要全心來愛</a:t>
+            </a:r>
+            <a:r>
+              <a:rPr lang="zh-CN" altLang="en-US" sz="6400" b="1" dirty="0">
                 <a:solidFill>
                   <a:srgbClr val="000066"/>
                 </a:solidFill>
@@ -4632,50 +4391,35 @@
                 <a:solidFill>
                   <a:srgbClr val="000066"/>
                 </a:solidFill>
-                <a:effectLst/>
                 <a:latin typeface="Microsoft JhengHei" panose="020B0604030504040204" pitchFamily="34" charset="-120"/>
                 <a:ea typeface="Microsoft JhengHei" panose="020B0604030504040204" pitchFamily="34" charset="-120"/>
               </a:rPr>
               <a:t>( </a:t>
             </a:r>
             <a:r>
-              <a:rPr lang="zh-CN" altLang="en-US" sz="3600" b="1" dirty="0" smtClean="0">
-                <a:solidFill>
-                  <a:srgbClr val="000066"/>
-                </a:solidFill>
-                <a:effectLst/>
+              <a:rPr lang="zh-CN" altLang="en-US" sz="3600" b="1" dirty="0">
+                <a:solidFill>
+                  <a:srgbClr val="000066"/>
+                </a:solidFill>
                 <a:latin typeface="Microsoft JhengHei" panose="020B0604030504040204" pitchFamily="34" charset="-120"/>
                 <a:ea typeface="Microsoft JhengHei" panose="020B0604030504040204" pitchFamily="34" charset="-120"/>
               </a:rPr>
-              <a:t>副</a:t>
-            </a:r>
-            <a:r>
-              <a:rPr lang="en-US" sz="3600" b="1" dirty="0" smtClean="0">
-                <a:solidFill>
-                  <a:srgbClr val="000066"/>
-                </a:solidFill>
-                <a:effectLst/>
+              <a:t>副歌</a:t>
+            </a:r>
+            <a:r>
+              <a:rPr lang="en-US" sz="3600" b="1" dirty="0">
+                <a:solidFill>
+                  <a:srgbClr val="000066"/>
+                </a:solidFill>
                 <a:latin typeface="Microsoft JhengHei" panose="020B0604030504040204" pitchFamily="34" charset="-120"/>
                 <a:ea typeface="Microsoft JhengHei" panose="020B0604030504040204" pitchFamily="34" charset="-120"/>
               </a:rPr>
-              <a:t> </a:t>
-            </a:r>
-            <a:r>
-              <a:rPr lang="en-US" sz="3600" b="1" dirty="0">
-                <a:solidFill>
-                  <a:srgbClr val="000066"/>
-                </a:solidFill>
-                <a:effectLst/>
-                <a:latin typeface="Microsoft JhengHei" panose="020B0604030504040204" pitchFamily="34" charset="-120"/>
-                <a:ea typeface="Microsoft JhengHei" panose="020B0604030504040204" pitchFamily="34" charset="-120"/>
-              </a:rPr>
-              <a:t>)</a:t>
+              <a:t> )</a:t>
             </a:r>
             <a:endParaRPr lang="vi-VN" sz="3600" b="1" dirty="0">
               <a:solidFill>
                 <a:srgbClr val="000066"/>
               </a:solidFill>
-              <a:effectLst/>
               <a:ea typeface="Microsoft JhengHei" panose="020B0604030504040204" pitchFamily="34" charset="-120"/>
             </a:endParaRPr>
           </a:p>
@@ -4744,47 +4488,27 @@
                 <a:latin typeface="微軟正黑體" pitchFamily="34" charset="-120"/>
                 <a:ea typeface="微軟正黑體" pitchFamily="34" charset="-120"/>
               </a:rPr>
-              <a:t>永遠住</a:t>
-            </a:r>
-            <a:r>
-              <a:rPr lang="zh-TW" altLang="en-US" sz="6400" b="1" dirty="0" smtClean="0">
+              <a:t>永遠住在</a:t>
+            </a:r>
+            <a:r>
+              <a:rPr lang="zh-CN" altLang="en-US" sz="6400" b="1" dirty="0">
                 <a:solidFill>
                   <a:srgbClr val="000066"/>
                 </a:solidFill>
                 <a:latin typeface="微軟正黑體" pitchFamily="34" charset="-120"/>
                 <a:ea typeface="微軟正黑體" pitchFamily="34" charset="-120"/>
               </a:rPr>
-              <a:t>在</a:t>
-            </a:r>
-            <a:r>
-              <a:rPr lang="zh-CN" altLang="en-US" sz="6400" b="1" dirty="0" smtClean="0">
+              <a:t>祢</a:t>
+            </a:r>
+            <a:r>
+              <a:rPr lang="zh-TW" altLang="en-US" sz="6400" b="1" dirty="0">
                 <a:solidFill>
                   <a:srgbClr val="000066"/>
                 </a:solidFill>
                 <a:latin typeface="微軟正黑體" pitchFamily="34" charset="-120"/>
                 <a:ea typeface="微軟正黑體" pitchFamily="34" charset="-120"/>
               </a:rPr>
-              <a:t>祢</a:t>
-            </a:r>
-            <a:r>
-              <a:rPr lang="zh-TW" altLang="en-US" sz="6400" b="1" dirty="0" smtClean="0">
-                <a:solidFill>
-                  <a:srgbClr val="000066"/>
-                </a:solidFill>
-                <a:latin typeface="微軟正黑體" pitchFamily="34" charset="-120"/>
-                <a:ea typeface="微軟正黑體" pitchFamily="34" charset="-120"/>
-              </a:rPr>
-              <a:t>殿</a:t>
-            </a:r>
-            <a:r>
-              <a:rPr lang="zh-TW" altLang="en-US" sz="6400" b="1" dirty="0">
-                <a:solidFill>
-                  <a:srgbClr val="000066"/>
-                </a:solidFill>
-                <a:latin typeface="微軟正黑體" pitchFamily="34" charset="-120"/>
-                <a:ea typeface="微軟正黑體" pitchFamily="34" charset="-120"/>
-              </a:rPr>
-              <a:t>中</a:t>
+              <a:t>殿中</a:t>
             </a:r>
             <a:endParaRPr lang="en-US" altLang="zh-TW" sz="6400" b="1" dirty="0">
               <a:solidFill>
@@ -4826,20 +4550,10 @@
                 <a:latin typeface="微軟正黑體" pitchFamily="34" charset="-120"/>
                 <a:ea typeface="微軟正黑體" pitchFamily="34" charset="-120"/>
               </a:rPr>
-              <a:t>我</a:t>
-            </a:r>
-            <a:r>
-              <a:rPr lang="zh-TW" altLang="en-US" sz="6400" b="1" dirty="0" smtClean="0">
-                <a:solidFill>
-                  <a:srgbClr val="000066"/>
-                </a:solidFill>
-                <a:latin typeface="微軟正黑體" pitchFamily="34" charset="-120"/>
-                <a:ea typeface="微軟正黑體" pitchFamily="34" charset="-120"/>
-              </a:rPr>
-              <a:t>愛</a:t>
-            </a:r>
-            <a:r>
-              <a:rPr lang="zh-CN" altLang="en-US" sz="6400" b="1" dirty="0" smtClean="0">
+              <a:t>我愛</a:t>
+            </a:r>
+            <a:r>
+              <a:rPr lang="zh-CN" altLang="en-US" sz="6400" b="1" dirty="0">
                 <a:solidFill>
                   <a:srgbClr val="000066"/>
                 </a:solidFill>
@@ -4886,50 +4600,35 @@
                 <a:solidFill>
                   <a:srgbClr val="000066"/>
                 </a:solidFill>
-                <a:effectLst/>
                 <a:latin typeface="Microsoft JhengHei" panose="020B0604030504040204" pitchFamily="34" charset="-120"/>
                 <a:ea typeface="Microsoft JhengHei" panose="020B0604030504040204" pitchFamily="34" charset="-120"/>
               </a:rPr>
               <a:t>( </a:t>
             </a:r>
             <a:r>
-              <a:rPr lang="zh-CN" altLang="en-US" sz="3600" b="1" dirty="0" smtClean="0">
-                <a:solidFill>
-                  <a:srgbClr val="000066"/>
-                </a:solidFill>
-                <a:effectLst/>
+              <a:rPr lang="zh-CN" altLang="en-US" sz="3600" b="1" dirty="0">
+                <a:solidFill>
+                  <a:srgbClr val="000066"/>
+                </a:solidFill>
                 <a:latin typeface="Microsoft JhengHei" panose="020B0604030504040204" pitchFamily="34" charset="-120"/>
                 <a:ea typeface="Microsoft JhengHei" panose="020B0604030504040204" pitchFamily="34" charset="-120"/>
               </a:rPr>
-              <a:t>副</a:t>
-            </a:r>
-            <a:r>
-              <a:rPr lang="en-US" sz="3600" b="1" dirty="0" smtClean="0">
-                <a:solidFill>
-                  <a:srgbClr val="000066"/>
-                </a:solidFill>
-                <a:effectLst/>
+              <a:t>副歌</a:t>
+            </a:r>
+            <a:r>
+              <a:rPr lang="en-US" sz="3600" b="1" dirty="0">
+                <a:solidFill>
+                  <a:srgbClr val="000066"/>
+                </a:solidFill>
                 <a:latin typeface="Microsoft JhengHei" panose="020B0604030504040204" pitchFamily="34" charset="-120"/>
                 <a:ea typeface="Microsoft JhengHei" panose="020B0604030504040204" pitchFamily="34" charset="-120"/>
               </a:rPr>
-              <a:t> </a:t>
-            </a:r>
-            <a:r>
-              <a:rPr lang="en-US" sz="3600" b="1" dirty="0">
-                <a:solidFill>
-                  <a:srgbClr val="000066"/>
-                </a:solidFill>
-                <a:effectLst/>
-                <a:latin typeface="Microsoft JhengHei" panose="020B0604030504040204" pitchFamily="34" charset="-120"/>
-                <a:ea typeface="Microsoft JhengHei" panose="020B0604030504040204" pitchFamily="34" charset="-120"/>
-              </a:rPr>
-              <a:t>)</a:t>
+              <a:t> )</a:t>
             </a:r>
             <a:endParaRPr lang="vi-VN" sz="3600" b="1" dirty="0">
               <a:solidFill>
                 <a:srgbClr val="000066"/>
               </a:solidFill>
-              <a:effectLst/>
               <a:ea typeface="Microsoft JhengHei" panose="020B0604030504040204" pitchFamily="34" charset="-120"/>
             </a:endParaRPr>
           </a:p>
@@ -4998,20 +4697,10 @@
                 <a:latin typeface="微軟正黑體" pitchFamily="34" charset="-120"/>
                 <a:ea typeface="微軟正黑體" pitchFamily="34" charset="-120"/>
               </a:rPr>
-              <a:t>喔  我</a:t>
-            </a:r>
-            <a:r>
-              <a:rPr lang="zh-TW" altLang="en-US" sz="6400" b="1" dirty="0" smtClean="0">
-                <a:solidFill>
-                  <a:srgbClr val="000066"/>
-                </a:solidFill>
-                <a:latin typeface="微軟正黑體" pitchFamily="34" charset="-120"/>
-                <a:ea typeface="微軟正黑體" pitchFamily="34" charset="-120"/>
-              </a:rPr>
-              <a:t>愛</a:t>
-            </a:r>
-            <a:r>
-              <a:rPr lang="zh-CN" altLang="en-US" sz="6400" b="1" dirty="0" smtClean="0">
+              <a:t>喔  我愛</a:t>
+            </a:r>
+            <a:r>
+              <a:rPr lang="zh-CN" altLang="en-US" sz="6400" b="1" dirty="0">
                 <a:solidFill>
                   <a:srgbClr val="000066"/>
                 </a:solidFill>
@@ -5040,20 +4729,10 @@
                 <a:latin typeface="微軟正黑體" pitchFamily="34" charset="-120"/>
                 <a:ea typeface="微軟正黑體" pitchFamily="34" charset="-120"/>
               </a:rPr>
-              <a:t>喔  全心敬</a:t>
-            </a:r>
-            <a:r>
-              <a:rPr lang="zh-TW" altLang="en-US" sz="6400" b="1" dirty="0" smtClean="0">
-                <a:solidFill>
-                  <a:srgbClr val="000066"/>
-                </a:solidFill>
-                <a:latin typeface="微軟正黑體" pitchFamily="34" charset="-120"/>
-                <a:ea typeface="微軟正黑體" pitchFamily="34" charset="-120"/>
-              </a:rPr>
-              <a:t>拜</a:t>
-            </a:r>
-            <a:r>
-              <a:rPr lang="zh-CN" altLang="en-US" sz="6400" b="1" dirty="0" smtClean="0">
+              <a:t>喔  全心敬拜</a:t>
+            </a:r>
+            <a:r>
+              <a:rPr lang="zh-CN" altLang="en-US" sz="6400" b="1" dirty="0">
                 <a:solidFill>
                   <a:srgbClr val="000066"/>
                 </a:solidFill>
@@ -5107,7 +4786,7 @@
               <a:t>( </a:t>
             </a:r>
             <a:r>
-              <a:rPr lang="zh-CN" altLang="en-US" sz="3600" b="1" dirty="0" smtClean="0">
+              <a:rPr lang="zh-CN" altLang="en-US" sz="3600" b="1" dirty="0">
                 <a:solidFill>
                   <a:srgbClr val="000066"/>
                 </a:solidFill>
@@ -5115,10 +4794,20 @@
                 <a:latin typeface="Microsoft JhengHei" panose="020B0604030504040204" pitchFamily="34" charset="-120"/>
                 <a:ea typeface="Microsoft JhengHei" panose="020B0604030504040204" pitchFamily="34" charset="-120"/>
               </a:rPr>
-              <a:t>副 </a:t>
-            </a:r>
-            <a:r>
-              <a:rPr lang="en-US" altLang="zh-CN" sz="3600" b="1" dirty="0">
+              <a:t>副</a:t>
+            </a:r>
+            <a:r>
+              <a:rPr lang="zh-CN" altLang="en-US" sz="3600" b="1" dirty="0">
+                <a:solidFill>
+                  <a:srgbClr val="000066"/>
+                </a:solidFill>
+                <a:latin typeface="Microsoft JhengHei" panose="020B0604030504040204" pitchFamily="34" charset="-120"/>
+                <a:ea typeface="Microsoft JhengHei" panose="020B0604030504040204" pitchFamily="34" charset="-120"/>
+              </a:rPr>
+              <a:t>歌</a:t>
+            </a:r>
+            <a:r>
+              <a:rPr lang="zh-CN" altLang="en-US" sz="3600" b="1" dirty="0">
                 <a:solidFill>
                   <a:srgbClr val="000066"/>
                 </a:solidFill>
@@ -5126,10 +4815,10 @@
                 <a:latin typeface="Microsoft JhengHei" panose="020B0604030504040204" pitchFamily="34" charset="-120"/>
                 <a:ea typeface="Microsoft JhengHei" panose="020B0604030504040204" pitchFamily="34" charset="-120"/>
               </a:rPr>
-              <a:t>2</a:t>
-            </a:r>
-            <a:r>
-              <a:rPr lang="en-US" sz="3600" b="1" dirty="0" smtClean="0">
+              <a:t> </a:t>
+            </a:r>
+            <a:r>
+              <a:rPr lang="en-US" altLang="zh-CN" sz="3600" b="1" dirty="0">
                 <a:solidFill>
                   <a:srgbClr val="000066"/>
                 </a:solidFill>
@@ -5137,7 +4826,7 @@
                 <a:latin typeface="Microsoft JhengHei" panose="020B0604030504040204" pitchFamily="34" charset="-120"/>
                 <a:ea typeface="Microsoft JhengHei" panose="020B0604030504040204" pitchFamily="34" charset="-120"/>
               </a:rPr>
-              <a:t> </a:t>
+              <a:t>2</a:t>
             </a:r>
             <a:r>
               <a:rPr lang="en-US" sz="3600" b="1" dirty="0">
@@ -5148,7 +4837,7 @@
                 <a:latin typeface="Microsoft JhengHei" panose="020B0604030504040204" pitchFamily="34" charset="-120"/>
                 <a:ea typeface="Microsoft JhengHei" panose="020B0604030504040204" pitchFamily="34" charset="-120"/>
               </a:rPr>
-              <a:t>)</a:t>
+              <a:t> )</a:t>
             </a:r>
             <a:endParaRPr lang="vi-VN" sz="3600" b="1" dirty="0">
               <a:solidFill>
@@ -5265,20 +4954,10 @@
                 <a:latin typeface="微軟正黑體" pitchFamily="34" charset="-120"/>
                 <a:ea typeface="微軟正黑體" pitchFamily="34" charset="-120"/>
               </a:rPr>
-              <a:t>我</a:t>
-            </a:r>
-            <a:r>
-              <a:rPr lang="zh-TW" altLang="en-US" sz="6400" b="1" dirty="0" smtClean="0">
-                <a:solidFill>
-                  <a:srgbClr val="000066"/>
-                </a:solidFill>
-                <a:latin typeface="微軟正黑體" pitchFamily="34" charset="-120"/>
-                <a:ea typeface="微軟正黑體" pitchFamily="34" charset="-120"/>
-              </a:rPr>
-              <a:t>愛</a:t>
-            </a:r>
-            <a:r>
-              <a:rPr lang="zh-CN" altLang="en-US" sz="6400" b="1" dirty="0" smtClean="0">
+              <a:t>我愛</a:t>
+            </a:r>
+            <a:r>
+              <a:rPr lang="zh-CN" altLang="en-US" sz="6400" b="1" dirty="0">
                 <a:solidFill>
                   <a:srgbClr val="000066"/>
                 </a:solidFill>
@@ -5325,61 +5004,45 @@
                 <a:solidFill>
                   <a:srgbClr val="000066"/>
                 </a:solidFill>
-                <a:effectLst/>
                 <a:latin typeface="Microsoft JhengHei" panose="020B0604030504040204" pitchFamily="34" charset="-120"/>
                 <a:ea typeface="Microsoft JhengHei" panose="020B0604030504040204" pitchFamily="34" charset="-120"/>
               </a:rPr>
               <a:t>( </a:t>
             </a:r>
             <a:r>
-              <a:rPr lang="zh-CN" altLang="en-US" sz="3600" b="1" dirty="0" smtClean="0">
-                <a:solidFill>
-                  <a:srgbClr val="000066"/>
-                </a:solidFill>
-                <a:effectLst/>
+              <a:rPr lang="zh-CN" altLang="en-US" sz="3600" b="1" dirty="0">
+                <a:solidFill>
+                  <a:srgbClr val="000066"/>
+                </a:solidFill>
                 <a:latin typeface="Microsoft JhengHei" panose="020B0604030504040204" pitchFamily="34" charset="-120"/>
                 <a:ea typeface="Microsoft JhengHei" panose="020B0604030504040204" pitchFamily="34" charset="-120"/>
               </a:rPr>
-              <a:t>副 </a:t>
+              <a:t>副歌 </a:t>
             </a:r>
             <a:r>
               <a:rPr lang="en-US" altLang="zh-CN" sz="3600" b="1" dirty="0">
                 <a:solidFill>
                   <a:srgbClr val="000066"/>
                 </a:solidFill>
-                <a:effectLst/>
                 <a:latin typeface="Microsoft JhengHei" panose="020B0604030504040204" pitchFamily="34" charset="-120"/>
                 <a:ea typeface="Microsoft JhengHei" panose="020B0604030504040204" pitchFamily="34" charset="-120"/>
               </a:rPr>
               <a:t>2</a:t>
             </a:r>
             <a:r>
-              <a:rPr lang="en-US" sz="3600" b="1" dirty="0" smtClean="0">
-                <a:solidFill>
-                  <a:srgbClr val="000066"/>
-                </a:solidFill>
-                <a:effectLst/>
+              <a:rPr lang="en-US" sz="3600" b="1" dirty="0">
+                <a:solidFill>
+                  <a:srgbClr val="000066"/>
+                </a:solidFill>
                 <a:latin typeface="Microsoft JhengHei" panose="020B0604030504040204" pitchFamily="34" charset="-120"/>
                 <a:ea typeface="Microsoft JhengHei" panose="020B0604030504040204" pitchFamily="34" charset="-120"/>
               </a:rPr>
-              <a:t> </a:t>
-            </a:r>
-            <a:r>
-              <a:rPr lang="en-US" sz="3600" b="1" dirty="0">
-                <a:solidFill>
-                  <a:srgbClr val="000066"/>
-                </a:solidFill>
-                <a:effectLst/>
-                <a:latin typeface="Microsoft JhengHei" panose="020B0604030504040204" pitchFamily="34" charset="-120"/>
-                <a:ea typeface="Microsoft JhengHei" panose="020B0604030504040204" pitchFamily="34" charset="-120"/>
-              </a:rPr>
-              <a:t>)</a:t>
+              <a:t> )</a:t>
             </a:r>
             <a:endParaRPr lang="vi-VN" sz="3600" b="1" dirty="0">
               <a:solidFill>
                 <a:srgbClr val="000066"/>
               </a:solidFill>
-              <a:effectLst/>
               <a:ea typeface="Microsoft JhengHei" panose="020B0604030504040204" pitchFamily="34" charset="-120"/>
             </a:endParaRPr>
           </a:p>
